--- a/dist/초3/영어/소리와문자/초3_영어_소리와문자_03_소문자와첫소리.pptx
+++ b/dist/초3/영어/소리와문자/초3_영어_소리와문자_03_소문자와첫소리.pptx
@@ -124,13 +124,13 @@
   <p:extLst>
     <p:ext uri="{521415D9-36F7-43E2-AB2F-B90AF26B5E84}">
       <p14:sectionLst xmlns:p14="http://schemas.microsoft.com/office/powerpoint/2010/main">
-        <p14:section name="도입" id="{56973e6d-fd56-a810-50d5-9ed6bf20123a}">
+        <p14:section name="도입" id="{10a72386-102c-9976-2273-a85d6353d609}">
           <p14:sldIdLst>
             <p14:sldId id="256"/>
             <p14:sldId id="257"/>
           </p14:sldIdLst>
         </p14:section>
-        <p14:section name="개념" id="{a3007c1d-79c6-53d2-9967-0f05ce1500a4}">
+        <p14:section name="개념" id="{ee40f48c-4841-5abf-f6bb-726a2ba34438}">
           <p14:sldIdLst>
             <p14:sldId id="258"/>
             <p14:sldId id="259"/>
@@ -142,38 +142,38 @@
             <p14:sldId id="267"/>
           </p14:sldIdLst>
         </p14:section>
-        <p14:section name="연습" id="{ea54f24f-2377-0b2f-f0e7-f2fb453cb7a4}">
+        <p14:section name="연습" id="{9353b45b-772a-7a7f-c3b3-cbd1d2c72697}">
           <p14:sldIdLst>
             <p14:sldId id="263"/>
             <p14:sldId id="266"/>
             <p14:sldId id="268"/>
           </p14:sldIdLst>
         </p14:section>
-        <p14:section name="개념" id="{ad118d16-ede6-7c71-1c48-351ffedcc5bb}">
+        <p14:section name="개념" id="{0764d12c-4635-b242-293d-dc89bbf5b9da}">
           <p14:sldIdLst/>
         </p14:section>
-        <p14:section name="연습" id="{b6438c1a-6b99-5917-556a-db32a5fca086}">
+        <p14:section name="연습" id="{e1fffe57-5f7a-5e8c-d956-1def47262c26}">
           <p14:sldIdLst/>
         </p14:section>
-        <p14:section name="개념" id="{6f371c87-b5b2-ef61-5de1-29f9643981cf}">
+        <p14:section name="개념" id="{72f55cce-5e03-2a0c-4a5a-182dc6267ca9}">
           <p14:sldIdLst/>
         </p14:section>
-        <p14:section name="연습" id="{ee100bad-27e4-3370-94c6-5c6b93afbc6e}">
+        <p14:section name="연습" id="{26fab108-7bfc-94a5-8d27-2abda4decdd2}">
           <p14:sldIdLst/>
         </p14:section>
-        <p14:section name="확인" id="{2a2715e4-66ac-774d-78ba-b8ccf2ac1752}">
+        <p14:section name="확인" id="{1fc34314-56a3-7b8f-66da-f90e7d3cfc1a}">
           <p14:sldIdLst>
             <p14:sldId id="269"/>
             <p14:sldId id="270"/>
             <p14:sldId id="271"/>
           </p14:sldIdLst>
         </p14:section>
-        <p14:section name="정리" id="{f5eba22e-6c59-89a3-ec0e-557bdaa64884}">
+        <p14:section name="정리" id="{83dfed8b-dd79-c778-6003-0718eb9439bf}">
           <p14:sldIdLst>
             <p14:sldId id="272"/>
           </p14:sldIdLst>
         </p14:section>
-        <p14:section name="보충" id="{42d283e0-0cbd-9c67-d428-e4fae38893ea}">
+        <p14:section name="보충" id="{17449972-5971-95a3-7d07-e191640d5573}">
           <p14:sldIdLst>
             <p14:sldId id="273"/>
           </p14:sldIdLst>

--- a/dist/초3/영어/소리와문자/초3_영어_소리와문자_03_소문자와첫소리.pptx
+++ b/dist/초3/영어/소리와문자/초3_영어_소리와문자_03_소문자와첫소리.pptx
@@ -124,13 +124,13 @@
   <p:extLst>
     <p:ext uri="{521415D9-36F7-43E2-AB2F-B90AF26B5E84}">
       <p14:sectionLst xmlns:p14="http://schemas.microsoft.com/office/powerpoint/2010/main">
-        <p14:section name="도입" id="{10a72386-102c-9976-2273-a85d6353d609}">
+        <p14:section name="도입" id="{c39f04fc-17eb-d08d-b983-6bdd43827848}">
           <p14:sldIdLst>
             <p14:sldId id="256"/>
             <p14:sldId id="257"/>
           </p14:sldIdLst>
         </p14:section>
-        <p14:section name="개념" id="{ee40f48c-4841-5abf-f6bb-726a2ba34438}">
+        <p14:section name="개념" id="{304d032e-fe09-1e4f-d007-0409a5e0da2c}">
           <p14:sldIdLst>
             <p14:sldId id="258"/>
             <p14:sldId id="259"/>
@@ -142,38 +142,38 @@
             <p14:sldId id="267"/>
           </p14:sldIdLst>
         </p14:section>
-        <p14:section name="연습" id="{9353b45b-772a-7a7f-c3b3-cbd1d2c72697}">
+        <p14:section name="연습" id="{1fd08828-d8cc-a12f-54ff-346f79ceb3c1}">
           <p14:sldIdLst>
             <p14:sldId id="263"/>
             <p14:sldId id="266"/>
             <p14:sldId id="268"/>
           </p14:sldIdLst>
         </p14:section>
-        <p14:section name="개념" id="{0764d12c-4635-b242-293d-dc89bbf5b9da}">
+        <p14:section name="개념" id="{08bd0418-4f6a-2bc1-031b-6645f151e83d}">
           <p14:sldIdLst/>
         </p14:section>
-        <p14:section name="연습" id="{e1fffe57-5f7a-5e8c-d956-1def47262c26}">
+        <p14:section name="연습" id="{fea58ccd-7bda-fffe-bd35-3f63886815c2}">
           <p14:sldIdLst/>
         </p14:section>
-        <p14:section name="개념" id="{72f55cce-5e03-2a0c-4a5a-182dc6267ca9}">
+        <p14:section name="개념" id="{84353474-5b9f-c1e8-566a-3ea32db27932}">
           <p14:sldIdLst/>
         </p14:section>
-        <p14:section name="연습" id="{26fab108-7bfc-94a5-8d27-2abda4decdd2}">
+        <p14:section name="연습" id="{3194dd74-68fb-feb4-9494-cf65922c2afe}">
           <p14:sldIdLst/>
         </p14:section>
-        <p14:section name="확인" id="{1fc34314-56a3-7b8f-66da-f90e7d3cfc1a}">
+        <p14:section name="확인" id="{001d179d-31d1-fc78-c9d6-3f89b7786722}">
           <p14:sldIdLst>
             <p14:sldId id="269"/>
             <p14:sldId id="270"/>
             <p14:sldId id="271"/>
           </p14:sldIdLst>
         </p14:section>
-        <p14:section name="정리" id="{83dfed8b-dd79-c778-6003-0718eb9439bf}">
+        <p14:section name="정리" id="{5cfd4e3e-adc7-7bbc-09c0-1de9c399067f}">
           <p14:sldIdLst>
             <p14:sldId id="272"/>
           </p14:sldIdLst>
         </p14:section>
-        <p14:section name="보충" id="{17449972-5971-95a3-7d07-e191640d5573}">
+        <p14:section name="보충" id="{2e3cbe3b-fed4-a0d3-5766-a6629390359b}">
           <p14:sldIdLst>
             <p14:sldId id="273"/>
           </p14:sldIdLst>
@@ -8857,7 +8857,7 @@
                 <a:ea typeface="맑은 고딕" pitchFamily="34" charset="-122"/>
                 <a:cs typeface="맑은 고딕" pitchFamily="34" charset="-120"/>
               </a:rPr>
-              <a:t>다음 시간: 인사하기</a:t>
+              <a:t>다음 시간: 자음 글자의 소리</a:t>
             </a:r>
             <a:endParaRPr lang="ko-KR" sz="2400" dirty="0"/>
           </a:p>

--- a/dist/초3/영어/소리와문자/초3_영어_소리와문자_03_소문자와첫소리.pptx
+++ b/dist/초3/영어/소리와문자/초3_영어_소리와문자_03_소문자와첫소리.pptx
@@ -124,13 +124,13 @@
   <p:extLst>
     <p:ext uri="{521415D9-36F7-43E2-AB2F-B90AF26B5E84}">
       <p14:sectionLst xmlns:p14="http://schemas.microsoft.com/office/powerpoint/2010/main">
-        <p14:section name="도입" id="{c39f04fc-17eb-d08d-b983-6bdd43827848}">
+        <p14:section name="도입" id="{e8ddeb44-0849-aa51-06d8-a2e8ff21c102}">
           <p14:sldIdLst>
             <p14:sldId id="256"/>
             <p14:sldId id="257"/>
           </p14:sldIdLst>
         </p14:section>
-        <p14:section name="개념" id="{304d032e-fe09-1e4f-d007-0409a5e0da2c}">
+        <p14:section name="개념" id="{9dcc2e21-a86e-fff8-fe22-da4153107677}">
           <p14:sldIdLst>
             <p14:sldId id="258"/>
             <p14:sldId id="259"/>
@@ -142,38 +142,38 @@
             <p14:sldId id="267"/>
           </p14:sldIdLst>
         </p14:section>
-        <p14:section name="연습" id="{1fd08828-d8cc-a12f-54ff-346f79ceb3c1}">
+        <p14:section name="연습" id="{3693761d-73b2-bc6c-b1bc-c7a2d9f00cbf}">
           <p14:sldIdLst>
             <p14:sldId id="263"/>
             <p14:sldId id="266"/>
             <p14:sldId id="268"/>
           </p14:sldIdLst>
         </p14:section>
-        <p14:section name="개념" id="{08bd0418-4f6a-2bc1-031b-6645f151e83d}">
+        <p14:section name="개념" id="{f0a04849-96b3-2a9c-b3a4-8698087c177f}">
           <p14:sldIdLst/>
         </p14:section>
-        <p14:section name="연습" id="{fea58ccd-7bda-fffe-bd35-3f63886815c2}">
+        <p14:section name="연습" id="{2f9b0b51-45ed-5992-7503-f7d6c5a9c074}">
           <p14:sldIdLst/>
         </p14:section>
-        <p14:section name="개념" id="{84353474-5b9f-c1e8-566a-3ea32db27932}">
+        <p14:section name="개념" id="{2adf984c-e21a-0743-0ca5-1b37dc6e7651}">
           <p14:sldIdLst/>
         </p14:section>
-        <p14:section name="연습" id="{3194dd74-68fb-feb4-9494-cf65922c2afe}">
+        <p14:section name="연습" id="{44868a9a-5922-4703-cf2b-dfe469f87acd}">
           <p14:sldIdLst/>
         </p14:section>
-        <p14:section name="확인" id="{001d179d-31d1-fc78-c9d6-3f89b7786722}">
+        <p14:section name="확인" id="{775a5901-89f7-3de3-2b4a-480dbd7b8f4c}">
           <p14:sldIdLst>
             <p14:sldId id="269"/>
             <p14:sldId id="270"/>
             <p14:sldId id="271"/>
           </p14:sldIdLst>
         </p14:section>
-        <p14:section name="정리" id="{5cfd4e3e-adc7-7bbc-09c0-1de9c399067f}">
+        <p14:section name="정리" id="{729aa174-2711-f430-5eea-37e18110a6b0}">
           <p14:sldIdLst>
             <p14:sldId id="272"/>
           </p14:sldIdLst>
         </p14:section>
-        <p14:section name="보충" id="{2e3cbe3b-fed4-a0d3-5766-a6629390359b}">
+        <p14:section name="보충" id="{7a8cf35e-297d-f0ea-a792-5bf3c77ee583}">
           <p14:sldIdLst>
             <p14:sldId id="273"/>
           </p14:sldIdLst>
